--- a/docs/presentation.pptx
+++ b/docs/presentation.pptx
@@ -723,7 +723,7 @@
           <a:lstStyle/>
           <a:p>
             <a:r>
-              <a:t>Спасибо за внимание! Я готов ответить на ваши вопросы.</a:t>
+              <a:t>Спасибо за внимание! Приложение можно открыть по QR-коду или по адресу на слайде. Сейчас я покажу его вживую, а потом готов ответить на ваши вопросы.</a:t>
             </a:r>
           </a:p>
         </p:txBody>
@@ -5262,14 +5262,84 @@
       </p:sp>
       <p:sp>
         <p:nvSpPr>
-          <p:cNvPr id="3" name="TextBox 2"/>
+          <p:cNvPr id="3" name="Rounded Rectangle 2"/>
+          <p:cNvSpPr/>
+          <p:nvPr/>
+        </p:nvSpPr>
+        <p:spPr>
+          <a:xfrm>
+            <a:off x="9080500" y="1778000"/>
+            <a:ext cx="2540000" cy="2540000"/>
+          </a:xfrm>
+          <a:prstGeom prst="roundRect">
+            <a:avLst>
+              <a:gd name="adj" fmla="val 6000"/>
+            </a:avLst>
+          </a:prstGeom>
+          <a:solidFill>
+            <a:srgbClr val="FFFFFF"/>
+          </a:solidFill>
+          <a:ln>
+            <a:noFill/>
+          </a:ln>
+          <a:effectLst/>
+        </p:spPr>
+        <p:style>
+          <a:lnRef idx="1">
+            <a:schemeClr val="accent1"/>
+          </a:lnRef>
+          <a:fillRef idx="3">
+            <a:schemeClr val="accent1"/>
+          </a:fillRef>
+          <a:effectRef idx="2">
+            <a:schemeClr val="accent1"/>
+          </a:effectRef>
+          <a:fontRef idx="minor">
+            <a:schemeClr val="lt1"/>
+          </a:fontRef>
+        </p:style>
+        <p:txBody>
+          <a:bodyPr rtlCol="0" anchor="ctr"/>
+          <a:lstStyle/>
+          <a:p>
+            <a:pPr algn="ctr"/>
+          </a:p>
+        </p:txBody>
+      </p:sp>
+      <p:pic>
+        <p:nvPicPr>
+          <p:cNvPr id="4" name="Picture 3" descr="qr.png"/>
+          <p:cNvPicPr>
+            <a:picLocks noChangeAspect="1"/>
+          </p:cNvPicPr>
+          <p:nvPr/>
+        </p:nvPicPr>
+        <p:blipFill>
+          <a:blip r:embed="rId3"/>
+          <a:stretch>
+            <a:fillRect/>
+          </a:stretch>
+        </p:blipFill>
+        <p:spPr>
+          <a:xfrm>
+            <a:off x="9207500" y="1905000"/>
+            <a:ext cx="2286000" cy="2286000"/>
+          </a:xfrm>
+          <a:prstGeom prst="rect">
+            <a:avLst/>
+          </a:prstGeom>
+        </p:spPr>
+      </p:pic>
+      <p:sp>
+        <p:nvSpPr>
+          <p:cNvPr id="5" name="TextBox 4"/>
           <p:cNvSpPr txBox="1"/>
           <p:nvPr/>
         </p:nvSpPr>
         <p:spPr>
           <a:xfrm>
-            <a:off x="8509000" y="2159000"/>
-            <a:ext cx="3683000" cy="2540000"/>
+            <a:off x="8636000" y="4508500"/>
+            <a:ext cx="3429000" cy="635000"/>
           </a:xfrm>
           <a:prstGeom prst="rect">
             <a:avLst/>
@@ -5277,7 +5347,7 @@
           <a:noFill/>
         </p:spPr>
         <p:txBody>
-          <a:bodyPr wrap="square" anchor="ctr" lIns="0" rIns="0" tIns="0" bIns="0">
+          <a:bodyPr wrap="square" anchor="t" lIns="0" rIns="0" tIns="0" bIns="0">
             <a:spAutoFit/>
           </a:bodyPr>
           <a:lstStyle/>
@@ -5288,26 +5358,26 @@
               </a:lnSpc>
             </a:pPr>
             <a:r>
-              <a:rPr sz="15000" b="1">
+              <a:rPr sz="1600" b="1">
                 <a:solidFill>
                   <a:srgbClr val="1E2A44"/>
                 </a:solidFill>
                 <a:latin typeface="Arial"/>
               </a:rPr>
-              <a:t>?</a:t>
-            </a:r>
-          </a:p>
-        </p:txBody>
-      </p:sp>
-      <p:sp>
-        <p:nvSpPr>
-          <p:cNvPr id="4" name="TextBox 3"/>
+              <a:t>Наведите камеру телефона</a:t>
+            </a:r>
+          </a:p>
+        </p:txBody>
+      </p:sp>
+      <p:sp>
+        <p:nvSpPr>
+          <p:cNvPr id="6" name="TextBox 5"/>
           <p:cNvSpPr txBox="1"/>
           <p:nvPr/>
         </p:nvSpPr>
         <p:spPr>
           <a:xfrm>
-            <a:off x="812800" y="2095500"/>
+            <a:off x="812800" y="1905000"/>
             <a:ext cx="6985000" cy="1905000"/>
           </a:xfrm>
           <a:prstGeom prst="rect">
@@ -5340,13 +5410,13 @@
       </p:sp>
       <p:sp>
         <p:nvSpPr>
-          <p:cNvPr id="5" name="TextBox 4"/>
+          <p:cNvPr id="7" name="TextBox 6"/>
           <p:cNvSpPr txBox="1"/>
           <p:nvPr/>
         </p:nvSpPr>
         <p:spPr>
           <a:xfrm>
-            <a:off x="812800" y="4064000"/>
+            <a:off x="812800" y="3810000"/>
             <a:ext cx="6985000" cy="444500"/>
           </a:xfrm>
           <a:prstGeom prst="rect">
@@ -5379,14 +5449,14 @@
       </p:sp>
       <p:sp>
         <p:nvSpPr>
-          <p:cNvPr id="6" name="TextBox 5"/>
+          <p:cNvPr id="8" name="TextBox 7"/>
           <p:cNvSpPr txBox="1"/>
           <p:nvPr/>
         </p:nvSpPr>
         <p:spPr>
           <a:xfrm>
-            <a:off x="812800" y="4699000"/>
-            <a:ext cx="6985000" cy="381000"/>
+            <a:off x="812800" y="4572000"/>
+            <a:ext cx="6985000" cy="254000"/>
           </a:xfrm>
           <a:prstGeom prst="rect">
             <a:avLst/>
@@ -5405,13 +5475,52 @@
               </a:lnSpc>
             </a:pPr>
             <a:r>
-              <a:rPr sz="1600" b="0">
+              <a:rPr sz="1300" b="1">
                 <a:solidFill>
                   <a:srgbClr val="F2994A"/>
                 </a:solidFill>
                 <a:latin typeface="Arial"/>
               </a:rPr>
-              <a:t>Сейчас покажу приложение вживую</a:t>
+              <a:t>ПРИЛОЖЕНИЕ ОНЛАЙН</a:t>
+            </a:r>
+          </a:p>
+        </p:txBody>
+      </p:sp>
+      <p:sp>
+        <p:nvSpPr>
+          <p:cNvPr id="9" name="TextBox 8"/>
+          <p:cNvSpPr txBox="1"/>
+          <p:nvPr/>
+        </p:nvSpPr>
+        <p:spPr>
+          <a:xfrm>
+            <a:off x="812800" y="4889500"/>
+            <a:ext cx="7302500" cy="381000"/>
+          </a:xfrm>
+          <a:prstGeom prst="rect">
+            <a:avLst/>
+          </a:prstGeom>
+          <a:noFill/>
+        </p:spPr>
+        <p:txBody>
+          <a:bodyPr wrap="square" anchor="t" lIns="0" rIns="0" tIns="0" bIns="0">
+            <a:spAutoFit/>
+          </a:bodyPr>
+          <a:lstStyle/>
+          <a:p>
+            <a:pPr algn="l">
+              <a:lnSpc>
+                <a:spcPct val="115000"/>
+              </a:lnSpc>
+            </a:pPr>
+            <a:r>
+              <a:rPr sz="2000" b="1">
+                <a:solidFill>
+                  <a:srgbClr val="F6F4EE"/>
+                </a:solidFill>
+                <a:latin typeface="Arial"/>
+              </a:rPr>
+              <a:t>komissar-dev.github.io/Dzhasimov-homework</a:t>
             </a:r>
           </a:p>
         </p:txBody>
